--- a/avoidance/1.pptx
+++ b/avoidance/1.pptx
@@ -11,6 +11,8 @@
     <p:sldId id="259" r:id="rId5"/>
     <p:sldId id="260" r:id="rId6"/>
     <p:sldId id="261" r:id="rId7"/>
+    <p:sldId id="262" r:id="rId8"/>
+    <p:sldId id="263" r:id="rId9"/>
   </p:sldIdLst>
   <p:sldSz cx="12192000" cy="6858000"/>
   <p:notesSz cx="6858000" cy="9144000"/>
@@ -109,6 +111,11 @@
       </a:defRPr>
     </a:lvl9pPr>
   </p:defaultTextStyle>
+  <p:extLst>
+    <p:ext uri="{EFAFB233-063F-42B5-8137-9DF3F51BA10A}">
+      <p15:sldGuideLst xmlns:p15="http://schemas.microsoft.com/office/powerpoint/2012/main"/>
+    </p:ext>
+  </p:extLst>
 </p:presentation>
 </file>
 
@@ -259,7 +266,7 @@
           <a:p>
             <a:fld id="{AF1F7242-F00F-40FC-B28D-72BBE9452106}" type="datetimeFigureOut">
               <a:rPr lang="zh-CN" altLang="en-US" smtClean="0"/>
-              <a:t>2026/7/29</a:t>
+              <a:t>2026/8/2</a:t>
             </a:fld>
             <a:endParaRPr lang="zh-CN" altLang="en-US"/>
           </a:p>
@@ -457,7 +464,7 @@
           <a:p>
             <a:fld id="{AF1F7242-F00F-40FC-B28D-72BBE9452106}" type="datetimeFigureOut">
               <a:rPr lang="zh-CN" altLang="en-US" smtClean="0"/>
-              <a:t>2026/7/29</a:t>
+              <a:t>2026/8/2</a:t>
             </a:fld>
             <a:endParaRPr lang="zh-CN" altLang="en-US"/>
           </a:p>
@@ -665,7 +672,7 @@
           <a:p>
             <a:fld id="{AF1F7242-F00F-40FC-B28D-72BBE9452106}" type="datetimeFigureOut">
               <a:rPr lang="zh-CN" altLang="en-US" smtClean="0"/>
-              <a:t>2026/7/29</a:t>
+              <a:t>2026/8/2</a:t>
             </a:fld>
             <a:endParaRPr lang="zh-CN" altLang="en-US"/>
           </a:p>
@@ -863,7 +870,7 @@
           <a:p>
             <a:fld id="{AF1F7242-F00F-40FC-B28D-72BBE9452106}" type="datetimeFigureOut">
               <a:rPr lang="zh-CN" altLang="en-US" smtClean="0"/>
-              <a:t>2026/7/29</a:t>
+              <a:t>2026/8/2</a:t>
             </a:fld>
             <a:endParaRPr lang="zh-CN" altLang="en-US"/>
           </a:p>
@@ -1138,7 +1145,7 @@
           <a:p>
             <a:fld id="{AF1F7242-F00F-40FC-B28D-72BBE9452106}" type="datetimeFigureOut">
               <a:rPr lang="zh-CN" altLang="en-US" smtClean="0"/>
-              <a:t>2026/7/29</a:t>
+              <a:t>2026/8/2</a:t>
             </a:fld>
             <a:endParaRPr lang="zh-CN" altLang="en-US"/>
           </a:p>
@@ -1403,7 +1410,7 @@
           <a:p>
             <a:fld id="{AF1F7242-F00F-40FC-B28D-72BBE9452106}" type="datetimeFigureOut">
               <a:rPr lang="zh-CN" altLang="en-US" smtClean="0"/>
-              <a:t>2026/7/29</a:t>
+              <a:t>2026/8/2</a:t>
             </a:fld>
             <a:endParaRPr lang="zh-CN" altLang="en-US"/>
           </a:p>
@@ -1815,7 +1822,7 @@
           <a:p>
             <a:fld id="{AF1F7242-F00F-40FC-B28D-72BBE9452106}" type="datetimeFigureOut">
               <a:rPr lang="zh-CN" altLang="en-US" smtClean="0"/>
-              <a:t>2026/7/29</a:t>
+              <a:t>2026/8/2</a:t>
             </a:fld>
             <a:endParaRPr lang="zh-CN" altLang="en-US"/>
           </a:p>
@@ -1956,7 +1963,7 @@
           <a:p>
             <a:fld id="{AF1F7242-F00F-40FC-B28D-72BBE9452106}" type="datetimeFigureOut">
               <a:rPr lang="zh-CN" altLang="en-US" smtClean="0"/>
-              <a:t>2026/7/29</a:t>
+              <a:t>2026/8/2</a:t>
             </a:fld>
             <a:endParaRPr lang="zh-CN" altLang="en-US"/>
           </a:p>
@@ -2069,7 +2076,7 @@
           <a:p>
             <a:fld id="{AF1F7242-F00F-40FC-B28D-72BBE9452106}" type="datetimeFigureOut">
               <a:rPr lang="zh-CN" altLang="en-US" smtClean="0"/>
-              <a:t>2026/7/29</a:t>
+              <a:t>2026/8/2</a:t>
             </a:fld>
             <a:endParaRPr lang="zh-CN" altLang="en-US"/>
           </a:p>
@@ -2380,7 +2387,7 @@
           <a:p>
             <a:fld id="{AF1F7242-F00F-40FC-B28D-72BBE9452106}" type="datetimeFigureOut">
               <a:rPr lang="zh-CN" altLang="en-US" smtClean="0"/>
-              <a:t>2026/7/29</a:t>
+              <a:t>2026/8/2</a:t>
             </a:fld>
             <a:endParaRPr lang="zh-CN" altLang="en-US"/>
           </a:p>
@@ -2668,7 +2675,7 @@
           <a:p>
             <a:fld id="{AF1F7242-F00F-40FC-B28D-72BBE9452106}" type="datetimeFigureOut">
               <a:rPr lang="zh-CN" altLang="en-US" smtClean="0"/>
-              <a:t>2026/7/29</a:t>
+              <a:t>2026/8/2</a:t>
             </a:fld>
             <a:endParaRPr lang="zh-CN" altLang="en-US"/>
           </a:p>
@@ -2909,7 +2916,7 @@
           <a:p>
             <a:fld id="{AF1F7242-F00F-40FC-B28D-72BBE9452106}" type="datetimeFigureOut">
               <a:rPr lang="zh-CN" altLang="en-US" smtClean="0"/>
-              <a:t>2026/7/29</a:t>
+              <a:t>2026/8/2</a:t>
             </a:fld>
             <a:endParaRPr lang="zh-CN" altLang="en-US"/>
           </a:p>
@@ -3512,6 +3519,66 @@
           </a:p>
         </p:txBody>
       </p:sp>
+      <p:pic>
+        <p:nvPicPr>
+          <p:cNvPr id="3" name="图片 2">
+            <a:extLst>
+              <a:ext uri="{FF2B5EF4-FFF2-40B4-BE49-F238E27FC236}">
+                <a16:creationId xmlns:a16="http://schemas.microsoft.com/office/drawing/2014/main" id="{ECCB5569-22BA-4B74-5C36-FBC1F5F0E3E9}"/>
+              </a:ext>
+            </a:extLst>
+          </p:cNvPr>
+          <p:cNvPicPr>
+            <a:picLocks noChangeAspect="1"/>
+          </p:cNvPicPr>
+          <p:nvPr/>
+        </p:nvPicPr>
+        <p:blipFill>
+          <a:blip r:embed="rId3"/>
+          <a:stretch>
+            <a:fillRect/>
+          </a:stretch>
+        </p:blipFill>
+        <p:spPr>
+          <a:xfrm>
+            <a:off x="1223209" y="4444555"/>
+            <a:ext cx="4943911" cy="1777305"/>
+          </a:xfrm>
+          <a:prstGeom prst="rect">
+            <a:avLst/>
+          </a:prstGeom>
+        </p:spPr>
+      </p:pic>
+      <p:pic>
+        <p:nvPicPr>
+          <p:cNvPr id="8" name="图片 7">
+            <a:extLst>
+              <a:ext uri="{FF2B5EF4-FFF2-40B4-BE49-F238E27FC236}">
+                <a16:creationId xmlns:a16="http://schemas.microsoft.com/office/drawing/2014/main" id="{74628472-3734-DE3C-37CC-4D678E66682B}"/>
+              </a:ext>
+            </a:extLst>
+          </p:cNvPr>
+          <p:cNvPicPr>
+            <a:picLocks noChangeAspect="1"/>
+          </p:cNvPicPr>
+          <p:nvPr/>
+        </p:nvPicPr>
+        <p:blipFill>
+          <a:blip r:embed="rId4"/>
+          <a:stretch>
+            <a:fillRect/>
+          </a:stretch>
+        </p:blipFill>
+        <p:spPr>
+          <a:xfrm>
+            <a:off x="6822731" y="4096427"/>
+            <a:ext cx="4146060" cy="2473563"/>
+          </a:xfrm>
+          <a:prstGeom prst="rect">
+            <a:avLst/>
+          </a:prstGeom>
+        </p:spPr>
+      </p:pic>
     </p:spTree>
     <p:extLst>
       <p:ext uri="{BB962C8B-B14F-4D97-AF65-F5344CB8AC3E}">
@@ -6384,6 +6451,797 @@
     <p:extLst>
       <p:ext uri="{BB962C8B-B14F-4D97-AF65-F5344CB8AC3E}">
         <p14:creationId xmlns:p14="http://schemas.microsoft.com/office/powerpoint/2010/main" val="1540866584"/>
+      </p:ext>
+    </p:extLst>
+  </p:cSld>
+  <p:clrMapOvr>
+    <a:masterClrMapping/>
+  </p:clrMapOvr>
+</p:sld>
+</file>
+
+<file path=ppt/slides/slide7.xml><?xml version="1.0" encoding="utf-8"?>
+<p:sld xmlns:a="http://schemas.openxmlformats.org/drawingml/2006/main" xmlns:r="http://schemas.openxmlformats.org/officeDocument/2006/relationships" xmlns:p="http://schemas.openxmlformats.org/presentationml/2006/main">
+  <p:cSld>
+    <p:spTree>
+      <p:nvGrpSpPr>
+        <p:cNvPr id="1" name=""/>
+        <p:cNvGrpSpPr/>
+        <p:nvPr/>
+      </p:nvGrpSpPr>
+      <p:grpSpPr>
+        <a:xfrm>
+          <a:off x="0" y="0"/>
+          <a:ext cx="0" cy="0"/>
+          <a:chOff x="0" y="0"/>
+          <a:chExt cx="0" cy="0"/>
+        </a:xfrm>
+      </p:grpSpPr>
+      <p:sp>
+        <p:nvSpPr>
+          <p:cNvPr id="4" name="文本框 3">
+            <a:extLst>
+              <a:ext uri="{FF2B5EF4-FFF2-40B4-BE49-F238E27FC236}">
+                <a16:creationId xmlns:a16="http://schemas.microsoft.com/office/drawing/2014/main" id="{0C4700D0-5346-90B5-B36D-8C4B01AD16A0}"/>
+              </a:ext>
+            </a:extLst>
+          </p:cNvPr>
+          <p:cNvSpPr txBox="1"/>
+          <p:nvPr/>
+        </p:nvSpPr>
+        <p:spPr>
+          <a:xfrm>
+            <a:off x="625794" y="428626"/>
+            <a:ext cx="8232455" cy="461665"/>
+          </a:xfrm>
+          <a:prstGeom prst="rect">
+            <a:avLst/>
+          </a:prstGeom>
+          <a:noFill/>
+        </p:spPr>
+        <p:txBody>
+          <a:bodyPr wrap="square" rtlCol="0">
+            <a:spAutoFit/>
+          </a:bodyPr>
+          <a:lstStyle/>
+          <a:p>
+            <a:r>
+              <a:rPr lang="zh-CN" altLang="en-US" sz="2400" dirty="0">
+                <a:latin typeface="微软雅黑" panose="020B0503020204020204" pitchFamily="34" charset="-122"/>
+                <a:ea typeface="微软雅黑" panose="020B0503020204020204" pitchFamily="34" charset="-122"/>
+              </a:rPr>
+              <a:t>感知层：</a:t>
+            </a:r>
+            <a:r>
+              <a:rPr lang="en-US" altLang="zh-CN" sz="2400" dirty="0">
+                <a:latin typeface="微软雅黑" panose="020B0503020204020204" pitchFamily="34" charset="-122"/>
+                <a:ea typeface="微软雅黑" panose="020B0503020204020204" pitchFamily="34" charset="-122"/>
+              </a:rPr>
+              <a:t>LiDAR</a:t>
+            </a:r>
+            <a:r>
+              <a:rPr lang="zh-CN" altLang="en-US" sz="2400" dirty="0">
+                <a:latin typeface="微软雅黑" panose="020B0503020204020204" pitchFamily="34" charset="-122"/>
+                <a:ea typeface="微软雅黑" panose="020B0503020204020204" pitchFamily="34" charset="-122"/>
+              </a:rPr>
+              <a:t>、</a:t>
+            </a:r>
+            <a:r>
+              <a:rPr lang="en-US" altLang="zh-CN" sz="2400" dirty="0">
+                <a:latin typeface="微软雅黑" panose="020B0503020204020204" pitchFamily="34" charset="-122"/>
+                <a:ea typeface="微软雅黑" panose="020B0503020204020204" pitchFamily="34" charset="-122"/>
+              </a:rPr>
+              <a:t>RGBD</a:t>
+            </a:r>
+            <a:r>
+              <a:rPr lang="zh-CN" altLang="en-US" sz="2400" dirty="0">
+                <a:latin typeface="微软雅黑" panose="020B0503020204020204" pitchFamily="34" charset="-122"/>
+                <a:ea typeface="微软雅黑" panose="020B0503020204020204" pitchFamily="34" charset="-122"/>
+              </a:rPr>
+              <a:t>、</a:t>
+            </a:r>
+            <a:r>
+              <a:rPr lang="en-US" altLang="zh-CN" sz="2400" dirty="0">
+                <a:latin typeface="微软雅黑" panose="020B0503020204020204" pitchFamily="34" charset="-122"/>
+                <a:ea typeface="微软雅黑" panose="020B0503020204020204" pitchFamily="34" charset="-122"/>
+              </a:rPr>
+              <a:t>Depth Camera</a:t>
+            </a:r>
+            <a:endParaRPr lang="zh-CN" altLang="en-US" sz="2400" dirty="0">
+              <a:latin typeface="微软雅黑" panose="020B0503020204020204" pitchFamily="34" charset="-122"/>
+              <a:ea typeface="微软雅黑" panose="020B0503020204020204" pitchFamily="34" charset="-122"/>
+            </a:endParaRPr>
+          </a:p>
+        </p:txBody>
+      </p:sp>
+      <p:sp>
+        <p:nvSpPr>
+          <p:cNvPr id="5" name="文本框 4">
+            <a:extLst>
+              <a:ext uri="{FF2B5EF4-FFF2-40B4-BE49-F238E27FC236}">
+                <a16:creationId xmlns:a16="http://schemas.microsoft.com/office/drawing/2014/main" id="{597734DF-1328-D547-E446-94F033D66600}"/>
+              </a:ext>
+            </a:extLst>
+          </p:cNvPr>
+          <p:cNvSpPr txBox="1"/>
+          <p:nvPr/>
+        </p:nvSpPr>
+        <p:spPr>
+          <a:xfrm>
+            <a:off x="625794" y="1028701"/>
+            <a:ext cx="7275193" cy="461665"/>
+          </a:xfrm>
+          <a:prstGeom prst="rect">
+            <a:avLst/>
+          </a:prstGeom>
+          <a:noFill/>
+        </p:spPr>
+        <p:txBody>
+          <a:bodyPr wrap="square" rtlCol="0">
+            <a:spAutoFit/>
+          </a:bodyPr>
+          <a:lstStyle/>
+          <a:p>
+            <a:r>
+              <a:rPr lang="zh-CN" altLang="en-US" sz="2400" dirty="0">
+                <a:latin typeface="微软雅黑" panose="020B0503020204020204" pitchFamily="34" charset="-122"/>
+                <a:ea typeface="微软雅黑" panose="020B0503020204020204" pitchFamily="34" charset="-122"/>
+              </a:rPr>
+              <a:t>环境表示层：</a:t>
+            </a:r>
+            <a:r>
+              <a:rPr lang="en-US" altLang="zh-CN" sz="2400" dirty="0">
+                <a:latin typeface="微软雅黑" panose="020B0503020204020204" pitchFamily="34" charset="-122"/>
+                <a:ea typeface="微软雅黑" panose="020B0503020204020204" pitchFamily="34" charset="-122"/>
+              </a:rPr>
+              <a:t>Mesh</a:t>
+            </a:r>
+            <a:r>
+              <a:rPr lang="zh-CN" altLang="en-US" sz="2400" dirty="0">
+                <a:latin typeface="微软雅黑" panose="020B0503020204020204" pitchFamily="34" charset="-122"/>
+                <a:ea typeface="微软雅黑" panose="020B0503020204020204" pitchFamily="34" charset="-122"/>
+              </a:rPr>
+              <a:t>、</a:t>
+            </a:r>
+            <a:r>
+              <a:rPr lang="en-US" altLang="zh-CN" sz="2400" dirty="0">
+                <a:latin typeface="微软雅黑" panose="020B0503020204020204" pitchFamily="34" charset="-122"/>
+                <a:ea typeface="微软雅黑" panose="020B0503020204020204" pitchFamily="34" charset="-122"/>
+              </a:rPr>
+              <a:t>Occupancy</a:t>
+            </a:r>
+            <a:r>
+              <a:rPr lang="zh-CN" altLang="en-US" sz="2400" dirty="0">
+                <a:latin typeface="微软雅黑" panose="020B0503020204020204" pitchFamily="34" charset="-122"/>
+                <a:ea typeface="微软雅黑" panose="020B0503020204020204" pitchFamily="34" charset="-122"/>
+              </a:rPr>
+              <a:t>、</a:t>
+            </a:r>
+            <a:r>
+              <a:rPr lang="en-US" altLang="zh-CN" sz="2400" dirty="0" err="1">
+                <a:latin typeface="微软雅黑" panose="020B0503020204020204" pitchFamily="34" charset="-122"/>
+                <a:ea typeface="微软雅黑" panose="020B0503020204020204" pitchFamily="34" charset="-122"/>
+              </a:rPr>
+              <a:t>GridTSDF</a:t>
+            </a:r>
+            <a:endParaRPr lang="zh-CN" altLang="en-US" sz="2400" dirty="0">
+              <a:latin typeface="微软雅黑" panose="020B0503020204020204" pitchFamily="34" charset="-122"/>
+              <a:ea typeface="微软雅黑" panose="020B0503020204020204" pitchFamily="34" charset="-122"/>
+            </a:endParaRPr>
+          </a:p>
+        </p:txBody>
+      </p:sp>
+      <p:sp>
+        <p:nvSpPr>
+          <p:cNvPr id="6" name="文本框 5">
+            <a:extLst>
+              <a:ext uri="{FF2B5EF4-FFF2-40B4-BE49-F238E27FC236}">
+                <a16:creationId xmlns:a16="http://schemas.microsoft.com/office/drawing/2014/main" id="{9256EE58-A578-DB1C-1050-E9B26B643942}"/>
+              </a:ext>
+            </a:extLst>
+          </p:cNvPr>
+          <p:cNvSpPr txBox="1"/>
+          <p:nvPr/>
+        </p:nvSpPr>
+        <p:spPr>
+          <a:xfrm>
+            <a:off x="625794" y="1576092"/>
+            <a:ext cx="6575105" cy="461665"/>
+          </a:xfrm>
+          <a:prstGeom prst="rect">
+            <a:avLst/>
+          </a:prstGeom>
+          <a:noFill/>
+        </p:spPr>
+        <p:txBody>
+          <a:bodyPr wrap="square" rtlCol="0">
+            <a:spAutoFit/>
+          </a:bodyPr>
+          <a:lstStyle/>
+          <a:p>
+            <a:r>
+              <a:rPr lang="zh-CN" altLang="en-US" sz="2400" dirty="0">
+                <a:latin typeface="微软雅黑" panose="020B0503020204020204" pitchFamily="34" charset="-122"/>
+                <a:ea typeface="微软雅黑" panose="020B0503020204020204" pitchFamily="34" charset="-122"/>
+              </a:rPr>
+              <a:t>安全评价层：</a:t>
+            </a:r>
+            <a:r>
+              <a:rPr lang="en-US" altLang="zh-CN" sz="2400" dirty="0">
+                <a:latin typeface="微软雅黑" panose="020B0503020204020204" pitchFamily="34" charset="-122"/>
+                <a:ea typeface="微软雅黑" panose="020B0503020204020204" pitchFamily="34" charset="-122"/>
+              </a:rPr>
+              <a:t>distance</a:t>
+            </a:r>
+            <a:r>
+              <a:rPr lang="zh-CN" altLang="en-US" sz="2400" dirty="0">
+                <a:latin typeface="微软雅黑" panose="020B0503020204020204" pitchFamily="34" charset="-122"/>
+                <a:ea typeface="微软雅黑" panose="020B0503020204020204" pitchFamily="34" charset="-122"/>
+              </a:rPr>
+              <a:t>、</a:t>
+            </a:r>
+            <a:r>
+              <a:rPr lang="en-US" altLang="zh-CN" sz="2400" dirty="0">
+                <a:latin typeface="微软雅黑" panose="020B0503020204020204" pitchFamily="34" charset="-122"/>
+                <a:ea typeface="微软雅黑" panose="020B0503020204020204" pitchFamily="34" charset="-122"/>
+              </a:rPr>
+              <a:t>gradient</a:t>
+            </a:r>
+            <a:r>
+              <a:rPr lang="zh-CN" altLang="en-US" sz="2400" dirty="0">
+                <a:latin typeface="微软雅黑" panose="020B0503020204020204" pitchFamily="34" charset="-122"/>
+                <a:ea typeface="微软雅黑" panose="020B0503020204020204" pitchFamily="34" charset="-122"/>
+              </a:rPr>
+              <a:t>、</a:t>
+            </a:r>
+            <a:r>
+              <a:rPr lang="en-US" altLang="zh-CN" sz="2400" dirty="0">
+                <a:latin typeface="微软雅黑" panose="020B0503020204020204" pitchFamily="34" charset="-122"/>
+                <a:ea typeface="微软雅黑" panose="020B0503020204020204" pitchFamily="34" charset="-122"/>
+              </a:rPr>
+              <a:t>normal</a:t>
+            </a:r>
+            <a:endParaRPr lang="zh-CN" altLang="en-US" sz="2400" dirty="0">
+              <a:latin typeface="微软雅黑" panose="020B0503020204020204" pitchFamily="34" charset="-122"/>
+              <a:ea typeface="微软雅黑" panose="020B0503020204020204" pitchFamily="34" charset="-122"/>
+            </a:endParaRPr>
+          </a:p>
+        </p:txBody>
+      </p:sp>
+      <p:sp>
+        <p:nvSpPr>
+          <p:cNvPr id="7" name="文本框 6">
+            <a:extLst>
+              <a:ext uri="{FF2B5EF4-FFF2-40B4-BE49-F238E27FC236}">
+                <a16:creationId xmlns:a16="http://schemas.microsoft.com/office/drawing/2014/main" id="{E736BA7A-E2A8-A8E1-52D9-FF42D02FD01A}"/>
+              </a:ext>
+            </a:extLst>
+          </p:cNvPr>
+          <p:cNvSpPr txBox="1"/>
+          <p:nvPr/>
+        </p:nvSpPr>
+        <p:spPr>
+          <a:xfrm>
+            <a:off x="625794" y="2123483"/>
+            <a:ext cx="6417943" cy="461665"/>
+          </a:xfrm>
+          <a:prstGeom prst="rect">
+            <a:avLst/>
+          </a:prstGeom>
+          <a:noFill/>
+        </p:spPr>
+        <p:txBody>
+          <a:bodyPr wrap="square" rtlCol="0">
+            <a:spAutoFit/>
+          </a:bodyPr>
+          <a:lstStyle/>
+          <a:p>
+            <a:r>
+              <a:rPr lang="zh-CN" altLang="en-US" sz="2400" dirty="0">
+                <a:latin typeface="微软雅黑" panose="020B0503020204020204" pitchFamily="34" charset="-122"/>
+                <a:ea typeface="微软雅黑" panose="020B0503020204020204" pitchFamily="34" charset="-122"/>
+              </a:rPr>
+              <a:t>安全控制层：</a:t>
+            </a:r>
+            <a:r>
+              <a:rPr lang="en-US" altLang="zh-CN" sz="2400" dirty="0">
+                <a:latin typeface="微软雅黑" panose="020B0503020204020204" pitchFamily="34" charset="-122"/>
+                <a:ea typeface="微软雅黑" panose="020B0503020204020204" pitchFamily="34" charset="-122"/>
+              </a:rPr>
+              <a:t>APF</a:t>
+            </a:r>
+            <a:r>
+              <a:rPr lang="zh-CN" altLang="en-US" sz="2400" dirty="0">
+                <a:latin typeface="微软雅黑" panose="020B0503020204020204" pitchFamily="34" charset="-122"/>
+                <a:ea typeface="微软雅黑" panose="020B0503020204020204" pitchFamily="34" charset="-122"/>
+              </a:rPr>
+              <a:t>、</a:t>
+            </a:r>
+            <a:r>
+              <a:rPr lang="en-US" altLang="zh-CN" sz="2400" dirty="0">
+                <a:latin typeface="微软雅黑" panose="020B0503020204020204" pitchFamily="34" charset="-122"/>
+                <a:ea typeface="微软雅黑" panose="020B0503020204020204" pitchFamily="34" charset="-122"/>
+              </a:rPr>
+              <a:t>SSA</a:t>
+            </a:r>
+            <a:r>
+              <a:rPr lang="zh-CN" altLang="en-US" sz="2400" dirty="0">
+                <a:latin typeface="微软雅黑" panose="020B0503020204020204" pitchFamily="34" charset="-122"/>
+                <a:ea typeface="微软雅黑" panose="020B0503020204020204" pitchFamily="34" charset="-122"/>
+              </a:rPr>
+              <a:t>、</a:t>
+            </a:r>
+            <a:r>
+              <a:rPr lang="en-US" altLang="zh-CN" sz="2400" dirty="0">
+                <a:latin typeface="微软雅黑" panose="020B0503020204020204" pitchFamily="34" charset="-122"/>
+                <a:ea typeface="微软雅黑" panose="020B0503020204020204" pitchFamily="34" charset="-122"/>
+              </a:rPr>
+              <a:t>CBF</a:t>
+            </a:r>
+            <a:r>
+              <a:rPr lang="zh-CN" altLang="en-US" sz="2400" dirty="0">
+                <a:latin typeface="微软雅黑" panose="020B0503020204020204" pitchFamily="34" charset="-122"/>
+                <a:ea typeface="微软雅黑" panose="020B0503020204020204" pitchFamily="34" charset="-122"/>
+              </a:rPr>
+              <a:t>、</a:t>
+            </a:r>
+            <a:r>
+              <a:rPr lang="en-US" altLang="zh-CN" sz="2400" dirty="0">
+                <a:latin typeface="微软雅黑" panose="020B0503020204020204" pitchFamily="34" charset="-122"/>
+                <a:ea typeface="微软雅黑" panose="020B0503020204020204" pitchFamily="34" charset="-122"/>
+              </a:rPr>
+              <a:t>MPC</a:t>
+            </a:r>
+            <a:r>
+              <a:rPr lang="zh-CN" altLang="en-US" sz="2400" dirty="0">
+                <a:latin typeface="微软雅黑" panose="020B0503020204020204" pitchFamily="34" charset="-122"/>
+                <a:ea typeface="微软雅黑" panose="020B0503020204020204" pitchFamily="34" charset="-122"/>
+              </a:rPr>
+              <a:t>、</a:t>
+            </a:r>
+            <a:r>
+              <a:rPr lang="en-US" altLang="zh-CN" sz="2400" dirty="0">
+                <a:latin typeface="微软雅黑" panose="020B0503020204020204" pitchFamily="34" charset="-122"/>
+                <a:ea typeface="微软雅黑" panose="020B0503020204020204" pitchFamily="34" charset="-122"/>
+              </a:rPr>
+              <a:t>VO</a:t>
+            </a:r>
+            <a:r>
+              <a:rPr lang="zh-CN" altLang="en-US" sz="2400" dirty="0">
+                <a:latin typeface="微软雅黑" panose="020B0503020204020204" pitchFamily="34" charset="-122"/>
+                <a:ea typeface="微软雅黑" panose="020B0503020204020204" pitchFamily="34" charset="-122"/>
+              </a:rPr>
+              <a:t> </a:t>
+            </a:r>
+          </a:p>
+        </p:txBody>
+      </p:sp>
+      <p:sp>
+        <p:nvSpPr>
+          <p:cNvPr id="8" name="文本框 7">
+            <a:extLst>
+              <a:ext uri="{FF2B5EF4-FFF2-40B4-BE49-F238E27FC236}">
+                <a16:creationId xmlns:a16="http://schemas.microsoft.com/office/drawing/2014/main" id="{1779ACAF-C533-FA28-A8A8-ECA6E90215EC}"/>
+              </a:ext>
+            </a:extLst>
+          </p:cNvPr>
+          <p:cNvSpPr txBox="1"/>
+          <p:nvPr/>
+        </p:nvSpPr>
+        <p:spPr>
+          <a:xfrm>
+            <a:off x="625795" y="2670874"/>
+            <a:ext cx="6575104" cy="461665"/>
+          </a:xfrm>
+          <a:prstGeom prst="rect">
+            <a:avLst/>
+          </a:prstGeom>
+          <a:noFill/>
+        </p:spPr>
+        <p:txBody>
+          <a:bodyPr wrap="square" rtlCol="0">
+            <a:spAutoFit/>
+          </a:bodyPr>
+          <a:lstStyle/>
+          <a:p>
+            <a:r>
+              <a:rPr lang="zh-CN" altLang="en-US" sz="2400" dirty="0">
+                <a:latin typeface="微软雅黑" panose="020B0503020204020204" pitchFamily="34" charset="-122"/>
+                <a:ea typeface="微软雅黑" panose="020B0503020204020204" pitchFamily="34" charset="-122"/>
+              </a:rPr>
+              <a:t>控制输出层：</a:t>
+            </a:r>
+            <a:r>
+              <a:rPr lang="en-US" altLang="zh-CN" sz="2400" dirty="0">
+                <a:latin typeface="微软雅黑" panose="020B0503020204020204" pitchFamily="34" charset="-122"/>
+                <a:ea typeface="微软雅黑" panose="020B0503020204020204" pitchFamily="34" charset="-122"/>
+              </a:rPr>
+              <a:t>V</a:t>
+            </a:r>
+            <a:endParaRPr lang="zh-CN" altLang="en-US" sz="2400" dirty="0">
+              <a:latin typeface="微软雅黑" panose="020B0503020204020204" pitchFamily="34" charset="-122"/>
+              <a:ea typeface="微软雅黑" panose="020B0503020204020204" pitchFamily="34" charset="-122"/>
+            </a:endParaRPr>
+          </a:p>
+        </p:txBody>
+      </p:sp>
+      <p:sp>
+        <p:nvSpPr>
+          <p:cNvPr id="9" name="文本框 8">
+            <a:extLst>
+              <a:ext uri="{FF2B5EF4-FFF2-40B4-BE49-F238E27FC236}">
+                <a16:creationId xmlns:a16="http://schemas.microsoft.com/office/drawing/2014/main" id="{37FB9D4D-44D4-A15A-7069-B12F014AF310}"/>
+              </a:ext>
+            </a:extLst>
+          </p:cNvPr>
+          <p:cNvSpPr txBox="1"/>
+          <p:nvPr/>
+        </p:nvSpPr>
+        <p:spPr>
+          <a:xfrm>
+            <a:off x="9472613" y="1490366"/>
+            <a:ext cx="1790875" cy="369332"/>
+          </a:xfrm>
+          <a:prstGeom prst="rect">
+            <a:avLst/>
+          </a:prstGeom>
+          <a:noFill/>
+        </p:spPr>
+        <p:txBody>
+          <a:bodyPr wrap="none" rtlCol="0">
+            <a:spAutoFit/>
+          </a:bodyPr>
+          <a:lstStyle/>
+          <a:p>
+            <a:r>
+              <a:rPr lang="en-US" altLang="zh-CN" dirty="0"/>
+              <a:t>CBF</a:t>
+            </a:r>
+            <a:r>
+              <a:rPr lang="zh-CN" altLang="en-US" dirty="0"/>
+              <a:t>和</a:t>
+            </a:r>
+            <a:r>
+              <a:rPr lang="en-US" altLang="zh-CN" dirty="0"/>
+              <a:t>QP</a:t>
+            </a:r>
+            <a:r>
+              <a:rPr lang="zh-CN" altLang="en-US" dirty="0"/>
+              <a:t>的关系</a:t>
+            </a:r>
+          </a:p>
+        </p:txBody>
+      </p:sp>
+    </p:spTree>
+    <p:extLst>
+      <p:ext uri="{BB962C8B-B14F-4D97-AF65-F5344CB8AC3E}">
+        <p14:creationId xmlns:p14="http://schemas.microsoft.com/office/powerpoint/2010/main" val="156815385"/>
+      </p:ext>
+    </p:extLst>
+  </p:cSld>
+  <p:clrMapOvr>
+    <a:masterClrMapping/>
+  </p:clrMapOvr>
+</p:sld>
+</file>
+
+<file path=ppt/slides/slide8.xml><?xml version="1.0" encoding="utf-8"?>
+<p:sld xmlns:a="http://schemas.openxmlformats.org/drawingml/2006/main" xmlns:r="http://schemas.openxmlformats.org/officeDocument/2006/relationships" xmlns:p="http://schemas.openxmlformats.org/presentationml/2006/main">
+  <p:cSld>
+    <p:spTree>
+      <p:nvGrpSpPr>
+        <p:cNvPr id="1" name="">
+          <a:extLst>
+            <a:ext uri="{FF2B5EF4-FFF2-40B4-BE49-F238E27FC236}">
+              <a16:creationId xmlns:a16="http://schemas.microsoft.com/office/drawing/2014/main" id="{04320378-689F-3AE9-BF37-3F18540009C6}"/>
+            </a:ext>
+          </a:extLst>
+        </p:cNvPr>
+        <p:cNvGrpSpPr/>
+        <p:nvPr/>
+      </p:nvGrpSpPr>
+      <p:grpSpPr>
+        <a:xfrm>
+          <a:off x="0" y="0"/>
+          <a:ext cx="0" cy="0"/>
+          <a:chOff x="0" y="0"/>
+          <a:chExt cx="0" cy="0"/>
+        </a:xfrm>
+      </p:grpSpPr>
+      <p:sp>
+        <p:nvSpPr>
+          <p:cNvPr id="4" name="文本框 3">
+            <a:extLst>
+              <a:ext uri="{FF2B5EF4-FFF2-40B4-BE49-F238E27FC236}">
+                <a16:creationId xmlns:a16="http://schemas.microsoft.com/office/drawing/2014/main" id="{5A5FE766-16EE-2E15-FEA6-1AD1EB687B36}"/>
+              </a:ext>
+            </a:extLst>
+          </p:cNvPr>
+          <p:cNvSpPr txBox="1"/>
+          <p:nvPr/>
+        </p:nvSpPr>
+        <p:spPr>
+          <a:xfrm>
+            <a:off x="625794" y="428626"/>
+            <a:ext cx="8232455" cy="461665"/>
+          </a:xfrm>
+          <a:prstGeom prst="rect">
+            <a:avLst/>
+          </a:prstGeom>
+          <a:noFill/>
+        </p:spPr>
+        <p:txBody>
+          <a:bodyPr wrap="square" rtlCol="0">
+            <a:spAutoFit/>
+          </a:bodyPr>
+          <a:lstStyle/>
+          <a:p>
+            <a:r>
+              <a:rPr lang="en-US" altLang="zh-CN" sz="2400" dirty="0">
+                <a:latin typeface="微软雅黑" panose="020B0503020204020204" pitchFamily="34" charset="-122"/>
+                <a:ea typeface="微软雅黑" panose="020B0503020204020204" pitchFamily="34" charset="-122"/>
+              </a:rPr>
+              <a:t>CBF (Control Barrier Function)</a:t>
+            </a:r>
+            <a:endParaRPr lang="zh-CN" altLang="en-US" sz="2400" dirty="0">
+              <a:latin typeface="微软雅黑" panose="020B0503020204020204" pitchFamily="34" charset="-122"/>
+              <a:ea typeface="微软雅黑" panose="020B0503020204020204" pitchFamily="34" charset="-122"/>
+            </a:endParaRPr>
+          </a:p>
+        </p:txBody>
+      </p:sp>
+      <p:sp>
+        <p:nvSpPr>
+          <p:cNvPr id="5" name="文本框 4">
+            <a:extLst>
+              <a:ext uri="{FF2B5EF4-FFF2-40B4-BE49-F238E27FC236}">
+                <a16:creationId xmlns:a16="http://schemas.microsoft.com/office/drawing/2014/main" id="{609F5EF1-DE10-685E-A43E-36A1C96710E6}"/>
+              </a:ext>
+            </a:extLst>
+          </p:cNvPr>
+          <p:cNvSpPr txBox="1"/>
+          <p:nvPr/>
+        </p:nvSpPr>
+        <p:spPr>
+          <a:xfrm>
+            <a:off x="625794" y="1016669"/>
+            <a:ext cx="10996711" cy="830997"/>
+          </a:xfrm>
+          <a:prstGeom prst="rect">
+            <a:avLst/>
+          </a:prstGeom>
+          <a:noFill/>
+        </p:spPr>
+        <p:txBody>
+          <a:bodyPr wrap="square" rtlCol="0">
+            <a:spAutoFit/>
+          </a:bodyPr>
+          <a:lstStyle/>
+          <a:p>
+            <a:r>
+              <a:rPr lang="en-US" altLang="zh-CN" sz="2400" dirty="0">
+                <a:latin typeface="微软雅黑" panose="020B0503020204020204" pitchFamily="34" charset="-122"/>
+                <a:ea typeface="微软雅黑" panose="020B0503020204020204" pitchFamily="34" charset="-122"/>
+              </a:rPr>
+              <a:t>CLF</a:t>
+            </a:r>
+            <a:r>
+              <a:rPr lang="zh-CN" altLang="en-US" sz="2400" dirty="0">
+                <a:latin typeface="微软雅黑" panose="020B0503020204020204" pitchFamily="34" charset="-122"/>
+                <a:ea typeface="微软雅黑" panose="020B0503020204020204" pitchFamily="34" charset="-122"/>
+              </a:rPr>
+              <a:t>（控制李雅普诺夫函数）：解决“去哪里”（稳定性和收敛性，例如追踪轨迹、到达终点）。</a:t>
+            </a:r>
+          </a:p>
+        </p:txBody>
+      </p:sp>
+      <p:sp>
+        <p:nvSpPr>
+          <p:cNvPr id="9" name="文本框 8">
+            <a:extLst>
+              <a:ext uri="{FF2B5EF4-FFF2-40B4-BE49-F238E27FC236}">
+                <a16:creationId xmlns:a16="http://schemas.microsoft.com/office/drawing/2014/main" id="{34772551-3ED6-B524-EDDF-71DC89B2CC08}"/>
+              </a:ext>
+            </a:extLst>
+          </p:cNvPr>
+          <p:cNvSpPr txBox="1"/>
+          <p:nvPr/>
+        </p:nvSpPr>
+        <p:spPr>
+          <a:xfrm>
+            <a:off x="10110287" y="290126"/>
+            <a:ext cx="1790875" cy="369332"/>
+          </a:xfrm>
+          <a:prstGeom prst="rect">
+            <a:avLst/>
+          </a:prstGeom>
+          <a:noFill/>
+        </p:spPr>
+        <p:txBody>
+          <a:bodyPr wrap="none" rtlCol="0">
+            <a:spAutoFit/>
+          </a:bodyPr>
+          <a:lstStyle/>
+          <a:p>
+            <a:r>
+              <a:rPr lang="en-US" altLang="zh-CN" dirty="0"/>
+              <a:t>CBF</a:t>
+            </a:r>
+            <a:r>
+              <a:rPr lang="zh-CN" altLang="en-US" dirty="0"/>
+              <a:t>和</a:t>
+            </a:r>
+            <a:r>
+              <a:rPr lang="en-US" altLang="zh-CN" dirty="0"/>
+              <a:t>QP</a:t>
+            </a:r>
+            <a:r>
+              <a:rPr lang="zh-CN" altLang="en-US" dirty="0"/>
+              <a:t>的关系</a:t>
+            </a:r>
+          </a:p>
+        </p:txBody>
+      </p:sp>
+      <p:sp>
+        <p:nvSpPr>
+          <p:cNvPr id="2" name="文本框 1">
+            <a:extLst>
+              <a:ext uri="{FF2B5EF4-FFF2-40B4-BE49-F238E27FC236}">
+                <a16:creationId xmlns:a16="http://schemas.microsoft.com/office/drawing/2014/main" id="{D21C2289-7554-E875-E6F1-A8C11B2DFEC4}"/>
+              </a:ext>
+            </a:extLst>
+          </p:cNvPr>
+          <p:cNvSpPr txBox="1"/>
+          <p:nvPr/>
+        </p:nvSpPr>
+        <p:spPr>
+          <a:xfrm>
+            <a:off x="625794" y="1974044"/>
+            <a:ext cx="10996711" cy="830997"/>
+          </a:xfrm>
+          <a:prstGeom prst="rect">
+            <a:avLst/>
+          </a:prstGeom>
+          <a:noFill/>
+        </p:spPr>
+        <p:txBody>
+          <a:bodyPr wrap="square" rtlCol="0">
+            <a:spAutoFit/>
+          </a:bodyPr>
+          <a:lstStyle/>
+          <a:p>
+            <a:r>
+              <a:rPr lang="en-US" altLang="zh-CN" sz="2400" dirty="0">
+                <a:latin typeface="微软雅黑" panose="020B0503020204020204" pitchFamily="34" charset="-122"/>
+                <a:ea typeface="微软雅黑" panose="020B0503020204020204" pitchFamily="34" charset="-122"/>
+              </a:rPr>
+              <a:t>CBF</a:t>
+            </a:r>
+            <a:r>
+              <a:rPr lang="zh-CN" altLang="en-US" sz="2400" dirty="0">
+                <a:latin typeface="微软雅黑" panose="020B0503020204020204" pitchFamily="34" charset="-122"/>
+                <a:ea typeface="微软雅黑" panose="020B0503020204020204" pitchFamily="34" charset="-122"/>
+              </a:rPr>
+              <a:t>（控制屏障函数）：解决“不能去哪里”（安全性，例如避障、防止倾覆、限制最大速度）。</a:t>
+            </a:r>
+          </a:p>
+        </p:txBody>
+      </p:sp>
+      <p:sp>
+        <p:nvSpPr>
+          <p:cNvPr id="3" name="文本框 2">
+            <a:extLst>
+              <a:ext uri="{FF2B5EF4-FFF2-40B4-BE49-F238E27FC236}">
+                <a16:creationId xmlns:a16="http://schemas.microsoft.com/office/drawing/2014/main" id="{1C8FDE33-C272-6001-EE25-F4F852F7916A}"/>
+              </a:ext>
+            </a:extLst>
+          </p:cNvPr>
+          <p:cNvSpPr txBox="1"/>
+          <p:nvPr/>
+        </p:nvSpPr>
+        <p:spPr>
+          <a:xfrm>
+            <a:off x="904451" y="3198167"/>
+            <a:ext cx="10996711" cy="461665"/>
+          </a:xfrm>
+          <a:prstGeom prst="rect">
+            <a:avLst/>
+          </a:prstGeom>
+          <a:noFill/>
+        </p:spPr>
+        <p:txBody>
+          <a:bodyPr wrap="square" rtlCol="0">
+            <a:spAutoFit/>
+          </a:bodyPr>
+          <a:lstStyle/>
+          <a:p>
+            <a:r>
+              <a:rPr lang="en-US" altLang="zh-CN" sz="2400" dirty="0">
+                <a:latin typeface="微软雅黑" panose="020B0503020204020204" pitchFamily="34" charset="-122"/>
+                <a:ea typeface="微软雅黑" panose="020B0503020204020204" pitchFamily="34" charset="-122"/>
+              </a:rPr>
+              <a:t>CBF </a:t>
+            </a:r>
+            <a:r>
+              <a:rPr lang="zh-CN" altLang="en-US" sz="2400" dirty="0">
+                <a:latin typeface="微软雅黑" panose="020B0503020204020204" pitchFamily="34" charset="-122"/>
+                <a:ea typeface="微软雅黑" panose="020B0503020204020204" pitchFamily="34" charset="-122"/>
+              </a:rPr>
+              <a:t>通过定义一个连续函数 </a:t>
+            </a:r>
+            <a:r>
+              <a:rPr lang="en-US" altLang="zh-CN" sz="2400" dirty="0">
+                <a:latin typeface="微软雅黑" panose="020B0503020204020204" pitchFamily="34" charset="-122"/>
+                <a:ea typeface="微软雅黑" panose="020B0503020204020204" pitchFamily="34" charset="-122"/>
+              </a:rPr>
+              <a:t>h(x)</a:t>
+            </a:r>
+            <a:r>
+              <a:rPr lang="zh-CN" altLang="en-US" sz="2400" dirty="0">
+                <a:latin typeface="微软雅黑" panose="020B0503020204020204" pitchFamily="34" charset="-122"/>
+                <a:ea typeface="微软雅黑" panose="020B0503020204020204" pitchFamily="34" charset="-122"/>
+              </a:rPr>
+              <a:t>，将状态空间划分为安全区与危险区</a:t>
+            </a:r>
+          </a:p>
+        </p:txBody>
+      </p:sp>
+      <p:sp>
+        <p:nvSpPr>
+          <p:cNvPr id="10" name="文本框 9">
+            <a:extLst>
+              <a:ext uri="{FF2B5EF4-FFF2-40B4-BE49-F238E27FC236}">
+                <a16:creationId xmlns:a16="http://schemas.microsoft.com/office/drawing/2014/main" id="{EA18C951-97DE-4644-95BA-118FCCEE14DD}"/>
+              </a:ext>
+            </a:extLst>
+          </p:cNvPr>
+          <p:cNvSpPr txBox="1"/>
+          <p:nvPr/>
+        </p:nvSpPr>
+        <p:spPr>
+          <a:xfrm>
+            <a:off x="904451" y="3924710"/>
+            <a:ext cx="10996711" cy="461665"/>
+          </a:xfrm>
+          <a:prstGeom prst="rect">
+            <a:avLst/>
+          </a:prstGeom>
+          <a:noFill/>
+        </p:spPr>
+        <p:txBody>
+          <a:bodyPr wrap="square" rtlCol="0">
+            <a:spAutoFit/>
+          </a:bodyPr>
+          <a:lstStyle/>
+          <a:p>
+            <a:r>
+              <a:rPr lang="zh-CN" altLang="en-US" sz="2400" dirty="0">
+                <a:latin typeface="微软雅黑" panose="020B0503020204020204" pitchFamily="34" charset="-122"/>
+                <a:ea typeface="微软雅黑" panose="020B0503020204020204" pitchFamily="34" charset="-122"/>
+              </a:rPr>
+              <a:t>当前系统状态 </a:t>
+            </a:r>
+            <a:r>
+              <a:rPr lang="en-US" altLang="zh-CN" sz="2400" dirty="0">
+                <a:latin typeface="微软雅黑" panose="020B0503020204020204" pitchFamily="34" charset="-122"/>
+                <a:ea typeface="微软雅黑" panose="020B0503020204020204" pitchFamily="34" charset="-122"/>
+              </a:rPr>
+              <a:t>x</a:t>
+            </a:r>
+            <a:r>
+              <a:rPr lang="zh-CN" altLang="en-US" sz="2400" dirty="0">
+                <a:latin typeface="微软雅黑" panose="020B0503020204020204" pitchFamily="34" charset="-122"/>
+                <a:ea typeface="微软雅黑" panose="020B0503020204020204" pitchFamily="34" charset="-122"/>
+              </a:rPr>
+              <a:t>（例如：机器人的当前位置、速度、姿态）</a:t>
+            </a:r>
+          </a:p>
+        </p:txBody>
+      </p:sp>
+    </p:spTree>
+    <p:extLst>
+      <p:ext uri="{BB962C8B-B14F-4D97-AF65-F5344CB8AC3E}">
+        <p14:creationId xmlns:p14="http://schemas.microsoft.com/office/powerpoint/2010/main" val="4247085280"/>
       </p:ext>
     </p:extLst>
   </p:cSld>
